--- a/tree/Binary Tree.pptx
+++ b/tree/Binary Tree.pptx
@@ -7400,7 +7400,15 @@
                   <a:schemeClr val="bg1"/>
                 </a:solidFill>
               </a:rPr>
-              <a:t>Less than 2</a:t>
+              <a:t>Less </a:t>
+            </a:r>
+            <a:r>
+              <a:rPr lang="en-PH" sz="2000" b="1">
+                <a:solidFill>
+                  <a:schemeClr val="bg1"/>
+                </a:solidFill>
+              </a:rPr>
+              <a:t>than 6</a:t>
             </a:r>
             <a:endParaRPr lang="en-US" sz="2000" dirty="0">
               <a:solidFill>
@@ -7465,13 +7473,13 @@
   <p:clrMapOvr>
     <a:masterClrMapping/>
   </p:clrMapOvr>
-  <mc:AlternateContent xmlns:mc="http://schemas.openxmlformats.org/markup-compatibility/2006">
-    <mc:Choice xmlns:p159="http://schemas.microsoft.com/office/powerpoint/2015/09/main" Requires="p159">
+  <mc:AlternateContent xmlns:mc="http://schemas.openxmlformats.org/markup-compatibility/2006" xmlns:p159="http://schemas.microsoft.com/office/powerpoint/2015/09/main">
+    <mc:Choice Requires="p159">
       <p:transition xmlns:p14="http://schemas.microsoft.com/office/powerpoint/2010/main" spd="slow" p14:dur="2000">
         <p159:morph option="byObject"/>
       </p:transition>
     </mc:Choice>
-    <mc:Fallback>
+    <mc:Fallback xmlns="">
       <p:transition spd="slow">
         <p:fade/>
       </p:transition>
@@ -8757,13 +8765,13 @@
   <p:clrMapOvr>
     <a:masterClrMapping/>
   </p:clrMapOvr>
-  <mc:AlternateContent xmlns:mc="http://schemas.openxmlformats.org/markup-compatibility/2006">
-    <mc:Choice xmlns:p159="http://schemas.microsoft.com/office/powerpoint/2015/09/main" Requires="p159">
+  <mc:AlternateContent xmlns:mc="http://schemas.openxmlformats.org/markup-compatibility/2006" xmlns:p159="http://schemas.microsoft.com/office/powerpoint/2015/09/main">
+    <mc:Choice Requires="p159">
       <p:transition xmlns:p14="http://schemas.microsoft.com/office/powerpoint/2010/main" spd="slow" p14:dur="2000">
         <p159:morph option="byObject"/>
       </p:transition>
     </mc:Choice>
-    <mc:Fallback>
+    <mc:Fallback xmlns="">
       <p:transition spd="slow">
         <p:fade/>
       </p:transition>
@@ -9793,13 +9801,13 @@
   <p:clrMapOvr>
     <a:masterClrMapping/>
   </p:clrMapOvr>
-  <mc:AlternateContent xmlns:mc="http://schemas.openxmlformats.org/markup-compatibility/2006">
-    <mc:Choice xmlns:p159="http://schemas.microsoft.com/office/powerpoint/2015/09/main" Requires="p159">
+  <mc:AlternateContent xmlns:mc="http://schemas.openxmlformats.org/markup-compatibility/2006" xmlns:p159="http://schemas.microsoft.com/office/powerpoint/2015/09/main">
+    <mc:Choice Requires="p159">
       <p:transition xmlns:p14="http://schemas.microsoft.com/office/powerpoint/2010/main" spd="slow" p14:dur="2000">
         <p159:morph option="byObject"/>
       </p:transition>
     </mc:Choice>
-    <mc:Fallback>
+    <mc:Fallback xmlns="">
       <p:transition spd="slow">
         <p:fade/>
       </p:transition>
@@ -10845,13 +10853,13 @@
   <p:clrMapOvr>
     <a:masterClrMapping/>
   </p:clrMapOvr>
-  <mc:AlternateContent xmlns:mc="http://schemas.openxmlformats.org/markup-compatibility/2006">
-    <mc:Choice xmlns:p159="http://schemas.microsoft.com/office/powerpoint/2015/09/main" Requires="p159">
+  <mc:AlternateContent xmlns:mc="http://schemas.openxmlformats.org/markup-compatibility/2006" xmlns:p159="http://schemas.microsoft.com/office/powerpoint/2015/09/main">
+    <mc:Choice Requires="p159">
       <p:transition xmlns:p14="http://schemas.microsoft.com/office/powerpoint/2010/main" spd="slow" p14:dur="2000">
         <p159:morph option="byObject"/>
       </p:transition>
     </mc:Choice>
-    <mc:Fallback>
+    <mc:Fallback xmlns="">
       <p:transition spd="slow">
         <p:fade/>
       </p:transition>
@@ -11897,13 +11905,13 @@
   <p:clrMapOvr>
     <a:masterClrMapping/>
   </p:clrMapOvr>
-  <mc:AlternateContent xmlns:mc="http://schemas.openxmlformats.org/markup-compatibility/2006">
-    <mc:Choice xmlns:p159="http://schemas.microsoft.com/office/powerpoint/2015/09/main" Requires="p159">
+  <mc:AlternateContent xmlns:mc="http://schemas.openxmlformats.org/markup-compatibility/2006" xmlns:p159="http://schemas.microsoft.com/office/powerpoint/2015/09/main">
+    <mc:Choice Requires="p159">
       <p:transition xmlns:p14="http://schemas.microsoft.com/office/powerpoint/2010/main" spd="slow" p14:dur="2000">
         <p159:morph option="byObject"/>
       </p:transition>
     </mc:Choice>
-    <mc:Fallback>
+    <mc:Fallback xmlns="">
       <p:transition spd="slow">
         <p:fade/>
       </p:transition>
@@ -12933,13 +12941,13 @@
   <p:clrMapOvr>
     <a:masterClrMapping/>
   </p:clrMapOvr>
-  <mc:AlternateContent xmlns:mc="http://schemas.openxmlformats.org/markup-compatibility/2006">
-    <mc:Choice xmlns:p159="http://schemas.microsoft.com/office/powerpoint/2015/09/main" Requires="p159">
+  <mc:AlternateContent xmlns:mc="http://schemas.openxmlformats.org/markup-compatibility/2006" xmlns:p159="http://schemas.microsoft.com/office/powerpoint/2015/09/main">
+    <mc:Choice Requires="p159">
       <p:transition xmlns:p14="http://schemas.microsoft.com/office/powerpoint/2010/main" spd="slow" p14:dur="2000">
         <p159:morph option="byObject"/>
       </p:transition>
     </mc:Choice>
-    <mc:Fallback>
+    <mc:Fallback xmlns="">
       <p:transition spd="slow">
         <p:fade/>
       </p:transition>
@@ -13969,13 +13977,13 @@
   <p:clrMapOvr>
     <a:masterClrMapping/>
   </p:clrMapOvr>
-  <mc:AlternateContent xmlns:mc="http://schemas.openxmlformats.org/markup-compatibility/2006">
-    <mc:Choice xmlns:p159="http://schemas.microsoft.com/office/powerpoint/2015/09/main" Requires="p159">
+  <mc:AlternateContent xmlns:mc="http://schemas.openxmlformats.org/markup-compatibility/2006" xmlns:p159="http://schemas.microsoft.com/office/powerpoint/2015/09/main">
+    <mc:Choice Requires="p159">
       <p:transition xmlns:p14="http://schemas.microsoft.com/office/powerpoint/2010/main" spd="slow" p14:dur="2000">
         <p159:morph option="byObject"/>
       </p:transition>
     </mc:Choice>
-    <mc:Fallback>
+    <mc:Fallback xmlns="">
       <p:transition spd="slow">
         <p:fade/>
       </p:transition>
@@ -14075,7 +14083,7 @@
         <p:spPr>
           <a:xfrm>
             <a:off x="609600" y="5469819"/>
-            <a:ext cx="10972800" cy="861774"/>
+            <a:ext cx="10972800" cy="477054"/>
           </a:xfrm>
           <a:prstGeom prst="rect">
             <a:avLst/>
@@ -14095,7 +14103,7 @@
                   <a:schemeClr val="bg1"/>
                 </a:solidFill>
               </a:rPr>
-              <a:t>In this example, node 2 and 3 each has two child nodes and node 1,4,5,6,7 each has a single node.</a:t>
+              <a:t>In this example, node 1, 2 and 3 each has two child nodes.</a:t>
             </a:r>
             <a:endParaRPr lang="en-US" sz="2500" dirty="0">
               <a:solidFill>
@@ -14863,7 +14871,7 @@
                   <a:schemeClr val="bg1"/>
                 </a:solidFill>
               </a:rPr>
-              <a:t>In this example, node 3 has one child nodes. This is still considered a binary tree.</a:t>
+              <a:t>In this example, node 3 has one child node. This is still considered a binary tree.</a:t>
             </a:r>
             <a:endParaRPr lang="en-US" sz="2500" dirty="0">
               <a:solidFill>
@@ -18923,13 +18931,13 @@
   <p:clrMapOvr>
     <a:masterClrMapping/>
   </p:clrMapOvr>
-  <mc:AlternateContent xmlns:mc="http://schemas.openxmlformats.org/markup-compatibility/2006">
-    <mc:Choice xmlns:p159="http://schemas.microsoft.com/office/powerpoint/2015/09/main" Requires="p159">
+  <mc:AlternateContent xmlns:mc="http://schemas.openxmlformats.org/markup-compatibility/2006" xmlns:p159="http://schemas.microsoft.com/office/powerpoint/2015/09/main">
+    <mc:Choice Requires="p159">
       <p:transition xmlns:p14="http://schemas.microsoft.com/office/powerpoint/2010/main" spd="slow" p14:dur="2000">
         <p159:morph option="byObject"/>
       </p:transition>
     </mc:Choice>
-    <mc:Fallback>
+    <mc:Fallback xmlns="">
       <p:transition spd="slow">
         <p:fade/>
       </p:transition>
@@ -19959,13 +19967,13 @@
   <p:clrMapOvr>
     <a:masterClrMapping/>
   </p:clrMapOvr>
-  <mc:AlternateContent xmlns:mc="http://schemas.openxmlformats.org/markup-compatibility/2006">
-    <mc:Choice xmlns:p159="http://schemas.microsoft.com/office/powerpoint/2015/09/main" Requires="p159">
+  <mc:AlternateContent xmlns:mc="http://schemas.openxmlformats.org/markup-compatibility/2006" xmlns:p159="http://schemas.microsoft.com/office/powerpoint/2015/09/main">
+    <mc:Choice Requires="p159">
       <p:transition xmlns:p14="http://schemas.microsoft.com/office/powerpoint/2010/main" spd="slow" p14:dur="2000">
         <p159:morph option="byObject"/>
       </p:transition>
     </mc:Choice>
-    <mc:Fallback>
+    <mc:Fallback xmlns="">
       <p:transition spd="slow">
         <p:fade/>
       </p:transition>
@@ -20995,13 +21003,13 @@
   <p:clrMapOvr>
     <a:masterClrMapping/>
   </p:clrMapOvr>
-  <mc:AlternateContent xmlns:mc="http://schemas.openxmlformats.org/markup-compatibility/2006">
-    <mc:Choice xmlns:p159="http://schemas.microsoft.com/office/powerpoint/2015/09/main" Requires="p159">
+  <mc:AlternateContent xmlns:mc="http://schemas.openxmlformats.org/markup-compatibility/2006" xmlns:p159="http://schemas.microsoft.com/office/powerpoint/2015/09/main">
+    <mc:Choice Requires="p159">
       <p:transition xmlns:p14="http://schemas.microsoft.com/office/powerpoint/2010/main" spd="slow" p14:dur="2000">
         <p159:morph option="byObject"/>
       </p:transition>
     </mc:Choice>
-    <mc:Fallback>
+    <mc:Fallback xmlns="">
       <p:transition spd="slow">
         <p:fade/>
       </p:transition>
@@ -21601,12 +21609,9 @@
 </file>
 
 <file path=customXml/item1.xml><?xml version="1.0" encoding="utf-8"?>
-<?mso-contentType ?>
-<FormTemplates xmlns="http://schemas.microsoft.com/sharepoint/v3/contenttype/forms">
-  <Display>DocumentLibraryForm</Display>
-  <Edit>DocumentLibraryForm</Edit>
-  <New>DocumentLibraryForm</New>
-</FormTemplates>
+<p:properties xmlns:p="http://schemas.microsoft.com/office/2006/metadata/properties" xmlns:xsi="http://www.w3.org/2001/XMLSchema-instance" xmlns:pc="http://schemas.microsoft.com/office/infopath/2007/PartnerControls">
+  <documentManagement/>
+</p:properties>
 </file>
 
 <file path=customXml/item2.xml><?xml version="1.0" encoding="utf-8"?>
@@ -21742,15 +21747,19 @@
 </file>
 
 <file path=customXml/item3.xml><?xml version="1.0" encoding="utf-8"?>
-<p:properties xmlns:p="http://schemas.microsoft.com/office/2006/metadata/properties" xmlns:xsi="http://www.w3.org/2001/XMLSchema-instance" xmlns:pc="http://schemas.microsoft.com/office/infopath/2007/PartnerControls">
-  <documentManagement/>
-</p:properties>
+<?mso-contentType ?>
+<FormTemplates xmlns="http://schemas.microsoft.com/sharepoint/v3/contenttype/forms">
+  <Display>DocumentLibraryForm</Display>
+  <Edit>DocumentLibraryForm</Edit>
+  <New>DocumentLibraryForm</New>
+</FormTemplates>
 </file>
 
 <file path=customXml/itemProps1.xml><?xml version="1.0" encoding="utf-8"?>
-<ds:datastoreItem xmlns:ds="http://schemas.openxmlformats.org/officeDocument/2006/customXml" ds:itemID="{C598EE6F-E26B-42BB-A8C4-ECA40997D302}">
+<ds:datastoreItem xmlns:ds="http://schemas.openxmlformats.org/officeDocument/2006/customXml" ds:itemID="{857C6131-C561-4201-AE06-D21CDE528BF4}">
   <ds:schemaRefs>
-    <ds:schemaRef ds:uri="http://schemas.microsoft.com/sharepoint/v3/contenttype/forms"/>
+    <ds:schemaRef ds:uri="http://schemas.microsoft.com/office/2006/metadata/properties"/>
+    <ds:schemaRef ds:uri="http://schemas.microsoft.com/office/infopath/2007/PartnerControls"/>
   </ds:schemaRefs>
 </ds:datastoreItem>
 </file>
@@ -21774,10 +21783,9 @@
 </file>
 
 <file path=customXml/itemProps3.xml><?xml version="1.0" encoding="utf-8"?>
-<ds:datastoreItem xmlns:ds="http://schemas.openxmlformats.org/officeDocument/2006/customXml" ds:itemID="{857C6131-C561-4201-AE06-D21CDE528BF4}">
+<ds:datastoreItem xmlns:ds="http://schemas.openxmlformats.org/officeDocument/2006/customXml" ds:itemID="{C598EE6F-E26B-42BB-A8C4-ECA40997D302}">
   <ds:schemaRefs>
-    <ds:schemaRef ds:uri="http://schemas.microsoft.com/office/2006/metadata/properties"/>
-    <ds:schemaRef ds:uri="http://schemas.microsoft.com/office/infopath/2007/PartnerControls"/>
+    <ds:schemaRef ds:uri="http://schemas.microsoft.com/sharepoint/v3/contenttype/forms"/>
   </ds:schemaRefs>
 </ds:datastoreItem>
 </file>
--- a/tree/Binary Tree.pptx
+++ b/tree/Binary Tree.pptx
@@ -5,7 +5,7 @@
     <p:sldMasterId id="2147483648" r:id="rId4"/>
   </p:sldMasterIdLst>
   <p:notesMasterIdLst>
-    <p:notesMasterId r:id="rId21"/>
+    <p:notesMasterId r:id="rId22"/>
   </p:notesMasterIdLst>
   <p:sldIdLst>
     <p:sldId id="293" r:id="rId5"/>
@@ -22,8 +22,9 @@
     <p:sldId id="332" r:id="rId16"/>
     <p:sldId id="333" r:id="rId17"/>
     <p:sldId id="334" r:id="rId18"/>
-    <p:sldId id="335" r:id="rId19"/>
-    <p:sldId id="336" r:id="rId20"/>
+    <p:sldId id="337" r:id="rId19"/>
+    <p:sldId id="335" r:id="rId20"/>
+    <p:sldId id="336" r:id="rId21"/>
   </p:sldIdLst>
   <p:sldSz cx="12192000" cy="6858000"/>
   <p:notesSz cx="6858000" cy="9144000"/>
@@ -1120,6 +1121,114 @@
         <p:cNvPr id="1" name="">
           <a:extLst>
             <a:ext uri="{FF2B5EF4-FFF2-40B4-BE49-F238E27FC236}">
+              <a16:creationId xmlns:a16="http://schemas.microsoft.com/office/drawing/2014/main" id="{B1731928-2551-9FE3-A056-A36A584FEFF4}"/>
+            </a:ext>
+          </a:extLst>
+        </p:cNvPr>
+        <p:cNvGrpSpPr/>
+        <p:nvPr/>
+      </p:nvGrpSpPr>
+      <p:grpSpPr>
+        <a:xfrm>
+          <a:off x="0" y="0"/>
+          <a:ext cx="0" cy="0"/>
+          <a:chOff x="0" y="0"/>
+          <a:chExt cx="0" cy="0"/>
+        </a:xfrm>
+      </p:grpSpPr>
+      <p:sp>
+        <p:nvSpPr>
+          <p:cNvPr id="2" name="Slide Image Placeholder 1">
+            <a:extLst>
+              <a:ext uri="{FF2B5EF4-FFF2-40B4-BE49-F238E27FC236}">
+                <a16:creationId xmlns:a16="http://schemas.microsoft.com/office/drawing/2014/main" id="{E360153D-91A9-CF9F-D366-B26CA4210CF9}"/>
+              </a:ext>
+            </a:extLst>
+          </p:cNvPr>
+          <p:cNvSpPr>
+            <a:spLocks noGrp="1" noRot="1" noChangeAspect="1"/>
+          </p:cNvSpPr>
+          <p:nvPr>
+            <p:ph type="sldImg"/>
+          </p:nvPr>
+        </p:nvSpPr>
+        <p:spPr/>
+      </p:sp>
+      <p:sp>
+        <p:nvSpPr>
+          <p:cNvPr id="3" name="Notes Placeholder 2">
+            <a:extLst>
+              <a:ext uri="{FF2B5EF4-FFF2-40B4-BE49-F238E27FC236}">
+                <a16:creationId xmlns:a16="http://schemas.microsoft.com/office/drawing/2014/main" id="{5D579CC3-A59A-A3FE-4340-B713507BE357}"/>
+              </a:ext>
+            </a:extLst>
+          </p:cNvPr>
+          <p:cNvSpPr>
+            <a:spLocks noGrp="1"/>
+          </p:cNvSpPr>
+          <p:nvPr>
+            <p:ph type="body" idx="1"/>
+          </p:nvPr>
+        </p:nvSpPr>
+        <p:spPr/>
+        <p:txBody>
+          <a:bodyPr/>
+          <a:lstStyle/>
+          <a:p>
+            <a:endParaRPr lang="en-PH" dirty="0"/>
+          </a:p>
+        </p:txBody>
+      </p:sp>
+      <p:sp>
+        <p:nvSpPr>
+          <p:cNvPr id="4" name="Slide Number Placeholder 3">
+            <a:extLst>
+              <a:ext uri="{FF2B5EF4-FFF2-40B4-BE49-F238E27FC236}">
+                <a16:creationId xmlns:a16="http://schemas.microsoft.com/office/drawing/2014/main" id="{58812DAA-FFFF-549F-4232-160C9CC76DAC}"/>
+              </a:ext>
+            </a:extLst>
+          </p:cNvPr>
+          <p:cNvSpPr>
+            <a:spLocks noGrp="1"/>
+          </p:cNvSpPr>
+          <p:nvPr>
+            <p:ph type="sldNum" sz="quarter" idx="5"/>
+          </p:nvPr>
+        </p:nvSpPr>
+        <p:spPr/>
+        <p:txBody>
+          <a:bodyPr/>
+          <a:lstStyle/>
+          <a:p>
+            <a:fld id="{FE90CCE9-4AAE-4E1F-85AD-521A406D6524}" type="slidenum">
+              <a:rPr lang="en-PH" smtClean="0"/>
+              <a:t>15</a:t>
+            </a:fld>
+            <a:endParaRPr lang="en-PH"/>
+          </a:p>
+        </p:txBody>
+      </p:sp>
+    </p:spTree>
+    <p:extLst>
+      <p:ext uri="{BB962C8B-B14F-4D97-AF65-F5344CB8AC3E}">
+        <p14:creationId xmlns:p14="http://schemas.microsoft.com/office/powerpoint/2010/main" val="3172073381"/>
+      </p:ext>
+    </p:extLst>
+  </p:cSld>
+  <p:clrMapOvr>
+    <a:masterClrMapping/>
+  </p:clrMapOvr>
+</p:notes>
+</file>
+
+<file path=ppt/notesSlides/notesSlide16.xml><?xml version="1.0" encoding="utf-8"?>
+<p:notes xmlns:a="http://schemas.openxmlformats.org/drawingml/2006/main" xmlns:r="http://schemas.openxmlformats.org/officeDocument/2006/relationships" xmlns:p="http://schemas.openxmlformats.org/presentationml/2006/main">
+  <p:cSld>
+    <p:spTree>
+      <p:nvGrpSpPr>
+        <p:cNvPr id="1" name="">
+          <a:extLst>
+            <a:ext uri="{FF2B5EF4-FFF2-40B4-BE49-F238E27FC236}">
               <a16:creationId xmlns:a16="http://schemas.microsoft.com/office/drawing/2014/main" id="{7DB9D627-3815-4A58-A64A-B63D763CE69E}"/>
             </a:ext>
           </a:extLst>
@@ -1201,7 +1310,7 @@
           <a:p>
             <a:fld id="{FE90CCE9-4AAE-4E1F-85AD-521A406D6524}" type="slidenum">
               <a:rPr lang="en-PH" smtClean="0"/>
-              <a:t>15</a:t>
+              <a:t>16</a:t>
             </a:fld>
             <a:endParaRPr lang="en-PH"/>
           </a:p>
@@ -1220,7 +1329,7 @@
 </p:notes>
 </file>
 
-<file path=ppt/notesSlides/notesSlide16.xml><?xml version="1.0" encoding="utf-8"?>
+<file path=ppt/notesSlides/notesSlide17.xml><?xml version="1.0" encoding="utf-8"?>
 <p:notes xmlns:a="http://schemas.openxmlformats.org/drawingml/2006/main" xmlns:r="http://schemas.openxmlformats.org/officeDocument/2006/relationships" xmlns:p="http://schemas.openxmlformats.org/presentationml/2006/main">
   <p:cSld>
     <p:spTree>
@@ -1309,7 +1418,7 @@
           <a:p>
             <a:fld id="{FE90CCE9-4AAE-4E1F-85AD-521A406D6524}" type="slidenum">
               <a:rPr lang="en-PH" smtClean="0"/>
-              <a:t>16</a:t>
+              <a:t>17</a:t>
             </a:fld>
             <a:endParaRPr lang="en-PH"/>
           </a:p>
@@ -7400,15 +7509,7 @@
                   <a:schemeClr val="bg1"/>
                 </a:solidFill>
               </a:rPr>
-              <a:t>Less </a:t>
-            </a:r>
-            <a:r>
-              <a:rPr lang="en-PH" sz="2000" b="1">
-                <a:solidFill>
-                  <a:schemeClr val="bg1"/>
-                </a:solidFill>
-              </a:rPr>
-              <a:t>than 6</a:t>
+              <a:t>Less than 6</a:t>
             </a:r>
             <a:endParaRPr lang="en-US" sz="2000" dirty="0">
               <a:solidFill>
@@ -8700,7 +8801,7 @@
                   <a:schemeClr val="bg1"/>
                 </a:solidFill>
               </a:rPr>
-              <a:t>Less than 2</a:t>
+              <a:t>Less than 6</a:t>
             </a:r>
             <a:endParaRPr lang="en-US" sz="2000" dirty="0">
               <a:solidFill>
@@ -11779,23 +11880,7 @@
                   <a:schemeClr val="bg1"/>
                 </a:solidFill>
               </a:rPr>
-              <a:t>Because</a:t>
-            </a:r>
-            <a:r>
-              <a:rPr lang="en-PH" sz="2500" b="1" dirty="0">
-                <a:solidFill>
-                  <a:srgbClr val="00B0F0"/>
-                </a:solidFill>
-              </a:rPr>
-              <a:t> 5 is greater than 4</a:t>
-            </a:r>
-            <a:r>
-              <a:rPr lang="en-PH" sz="2500" b="1" dirty="0">
-                <a:solidFill>
-                  <a:schemeClr val="bg1"/>
-                </a:solidFill>
-              </a:rPr>
-              <a:t>, we know that we should go to the right subtree.</a:t>
+              <a:t>When we search for a node, we always start at the root.</a:t>
             </a:r>
             <a:endParaRPr lang="en-US" sz="2500" dirty="0">
               <a:solidFill>
@@ -11936,6 +12021,1066 @@
         <p:cNvPr id="1" name="">
           <a:extLst>
             <a:ext uri="{FF2B5EF4-FFF2-40B4-BE49-F238E27FC236}">
+              <a16:creationId xmlns:a16="http://schemas.microsoft.com/office/drawing/2014/main" id="{E6EA9B8D-3C30-67DC-11D1-7E1E95C0885C}"/>
+            </a:ext>
+          </a:extLst>
+        </p:cNvPr>
+        <p:cNvGrpSpPr/>
+        <p:nvPr/>
+      </p:nvGrpSpPr>
+      <p:grpSpPr>
+        <a:xfrm>
+          <a:off x="0" y="0"/>
+          <a:ext cx="0" cy="0"/>
+          <a:chOff x="0" y="0"/>
+          <a:chExt cx="0" cy="0"/>
+        </a:xfrm>
+      </p:grpSpPr>
+      <p:cxnSp>
+        <p:nvCxnSpPr>
+          <p:cNvPr id="2" name="Straight Arrow Connector 1">
+            <a:extLst>
+              <a:ext uri="{FF2B5EF4-FFF2-40B4-BE49-F238E27FC236}">
+                <a16:creationId xmlns:a16="http://schemas.microsoft.com/office/drawing/2014/main" id="{0ED6D1F9-993A-74D1-9FB6-DD0859D9FDC4}"/>
+              </a:ext>
+            </a:extLst>
+          </p:cNvPr>
+          <p:cNvCxnSpPr>
+            <a:cxnSpLocks/>
+          </p:cNvCxnSpPr>
+          <p:nvPr/>
+        </p:nvCxnSpPr>
+        <p:spPr>
+          <a:xfrm flipV="1">
+            <a:off x="5974586" y="1215609"/>
+            <a:ext cx="0" cy="3739308"/>
+          </a:xfrm>
+          <a:prstGeom prst="straightConnector1">
+            <a:avLst/>
+          </a:prstGeom>
+          <a:ln w="57150">
+            <a:solidFill>
+              <a:schemeClr val="bg1">
+                <a:alpha val="50099"/>
+              </a:schemeClr>
+            </a:solidFill>
+            <a:prstDash val="dash"/>
+            <a:headEnd type="none" w="med" len="med"/>
+            <a:tailEnd type="none" w="med" len="med"/>
+          </a:ln>
+        </p:spPr>
+        <p:style>
+          <a:lnRef idx="1">
+            <a:schemeClr val="accent1"/>
+          </a:lnRef>
+          <a:fillRef idx="0">
+            <a:schemeClr val="accent1"/>
+          </a:fillRef>
+          <a:effectRef idx="0">
+            <a:schemeClr val="accent1"/>
+          </a:effectRef>
+          <a:fontRef idx="minor">
+            <a:schemeClr val="tx1"/>
+          </a:fontRef>
+        </p:style>
+      </p:cxnSp>
+      <p:sp>
+        <p:nvSpPr>
+          <p:cNvPr id="21" name="Rectangle 20">
+            <a:extLst>
+              <a:ext uri="{FF2B5EF4-FFF2-40B4-BE49-F238E27FC236}">
+                <a16:creationId xmlns:a16="http://schemas.microsoft.com/office/drawing/2014/main" id="{D8143705-357F-FC99-ADB6-E511161298C8}"/>
+              </a:ext>
+            </a:extLst>
+          </p:cNvPr>
+          <p:cNvSpPr/>
+          <p:nvPr/>
+        </p:nvSpPr>
+        <p:spPr>
+          <a:xfrm>
+            <a:off x="1839579" y="1225099"/>
+            <a:ext cx="4104930" cy="3729818"/>
+          </a:xfrm>
+          <a:prstGeom prst="rect">
+            <a:avLst/>
+          </a:prstGeom>
+          <a:solidFill>
+            <a:srgbClr val="FF0000">
+              <a:alpha val="33482"/>
+            </a:srgbClr>
+          </a:solidFill>
+          <a:ln>
+            <a:solidFill>
+              <a:schemeClr val="accent1">
+                <a:shade val="15000"/>
+                <a:alpha val="27872"/>
+              </a:schemeClr>
+            </a:solidFill>
+          </a:ln>
+        </p:spPr>
+        <p:style>
+          <a:lnRef idx="2">
+            <a:schemeClr val="accent1">
+              <a:shade val="15000"/>
+            </a:schemeClr>
+          </a:lnRef>
+          <a:fillRef idx="1">
+            <a:schemeClr val="accent1"/>
+          </a:fillRef>
+          <a:effectRef idx="0">
+            <a:schemeClr val="accent1"/>
+          </a:effectRef>
+          <a:fontRef idx="minor">
+            <a:schemeClr val="lt1"/>
+          </a:fontRef>
+        </p:style>
+        <p:txBody>
+          <a:bodyPr rtlCol="0" anchor="ctr"/>
+          <a:lstStyle/>
+          <a:p>
+            <a:pPr algn="ctr"/>
+            <a:endParaRPr lang="en-US"/>
+          </a:p>
+        </p:txBody>
+      </p:sp>
+      <p:sp>
+        <p:nvSpPr>
+          <p:cNvPr id="22" name="Rectangle 21">
+            <a:extLst>
+              <a:ext uri="{FF2B5EF4-FFF2-40B4-BE49-F238E27FC236}">
+                <a16:creationId xmlns:a16="http://schemas.microsoft.com/office/drawing/2014/main" id="{6537C939-FFD0-452C-8674-FDD56599197C}"/>
+              </a:ext>
+            </a:extLst>
+          </p:cNvPr>
+          <p:cNvSpPr/>
+          <p:nvPr/>
+        </p:nvSpPr>
+        <p:spPr>
+          <a:xfrm>
+            <a:off x="6004664" y="1225621"/>
+            <a:ext cx="4347757" cy="3729296"/>
+          </a:xfrm>
+          <a:prstGeom prst="rect">
+            <a:avLst/>
+          </a:prstGeom>
+          <a:solidFill>
+            <a:srgbClr val="00B050">
+              <a:alpha val="33482"/>
+            </a:srgbClr>
+          </a:solidFill>
+          <a:ln>
+            <a:solidFill>
+              <a:schemeClr val="accent1">
+                <a:shade val="15000"/>
+                <a:alpha val="27872"/>
+              </a:schemeClr>
+            </a:solidFill>
+          </a:ln>
+        </p:spPr>
+        <p:style>
+          <a:lnRef idx="2">
+            <a:schemeClr val="accent1">
+              <a:shade val="15000"/>
+            </a:schemeClr>
+          </a:lnRef>
+          <a:fillRef idx="1">
+            <a:schemeClr val="accent1"/>
+          </a:fillRef>
+          <a:effectRef idx="0">
+            <a:schemeClr val="accent1"/>
+          </a:effectRef>
+          <a:fontRef idx="minor">
+            <a:schemeClr val="lt1"/>
+          </a:fontRef>
+        </p:style>
+        <p:txBody>
+          <a:bodyPr rtlCol="0" anchor="ctr"/>
+          <a:lstStyle/>
+          <a:p>
+            <a:pPr algn="ctr"/>
+            <a:endParaRPr lang="en-US"/>
+          </a:p>
+        </p:txBody>
+      </p:sp>
+      <p:sp>
+        <p:nvSpPr>
+          <p:cNvPr id="5" name="Title 1">
+            <a:extLst>
+              <a:ext uri="{FF2B5EF4-FFF2-40B4-BE49-F238E27FC236}">
+                <a16:creationId xmlns:a16="http://schemas.microsoft.com/office/drawing/2014/main" id="{16D3CE8C-7955-BFDA-54E3-BEE4A4AC5623}"/>
+              </a:ext>
+            </a:extLst>
+          </p:cNvPr>
+          <p:cNvSpPr>
+            <a:spLocks noGrp="1"/>
+          </p:cNvSpPr>
+          <p:nvPr>
+            <p:ph type="ctrTitle"/>
+          </p:nvPr>
+        </p:nvSpPr>
+        <p:spPr>
+          <a:xfrm>
+            <a:off x="1524000" y="497150"/>
+            <a:ext cx="9144000" cy="718459"/>
+          </a:xfrm>
+        </p:spPr>
+        <p:txBody>
+          <a:bodyPr>
+            <a:normAutofit fontScale="90000"/>
+          </a:bodyPr>
+          <a:lstStyle/>
+          <a:p>
+            <a:r>
+              <a:rPr lang="en-US" sz="6000" b="1" i="0" dirty="0">
+                <a:solidFill>
+                  <a:srgbClr val="00B050"/>
+                </a:solidFill>
+                <a:effectLst/>
+              </a:rPr>
+              <a:t>Binary Search Tree</a:t>
+            </a:r>
+            <a:endParaRPr lang="en-PH" dirty="0">
+              <a:solidFill>
+                <a:srgbClr val="00B050"/>
+              </a:solidFill>
+            </a:endParaRPr>
+          </a:p>
+        </p:txBody>
+      </p:sp>
+      <p:sp>
+        <p:nvSpPr>
+          <p:cNvPr id="6" name="Oval 5">
+            <a:extLst>
+              <a:ext uri="{FF2B5EF4-FFF2-40B4-BE49-F238E27FC236}">
+                <a16:creationId xmlns:a16="http://schemas.microsoft.com/office/drawing/2014/main" id="{DAA6A1D7-0574-9627-F90C-2C869A9F2866}"/>
+              </a:ext>
+            </a:extLst>
+          </p:cNvPr>
+          <p:cNvSpPr/>
+          <p:nvPr/>
+        </p:nvSpPr>
+        <p:spPr>
+          <a:xfrm>
+            <a:off x="5614586" y="1636729"/>
+            <a:ext cx="720000" cy="720000"/>
+          </a:xfrm>
+          <a:prstGeom prst="ellipse">
+            <a:avLst/>
+          </a:prstGeom>
+          <a:solidFill>
+            <a:srgbClr val="6AB5FF"/>
+          </a:solidFill>
+        </p:spPr>
+        <p:style>
+          <a:lnRef idx="2">
+            <a:schemeClr val="accent1">
+              <a:shade val="15000"/>
+            </a:schemeClr>
+          </a:lnRef>
+          <a:fillRef idx="1">
+            <a:schemeClr val="accent1"/>
+          </a:fillRef>
+          <a:effectRef idx="0">
+            <a:schemeClr val="accent1"/>
+          </a:effectRef>
+          <a:fontRef idx="minor">
+            <a:schemeClr val="lt1"/>
+          </a:fontRef>
+        </p:style>
+        <p:txBody>
+          <a:bodyPr rtlCol="0" anchor="ctr"/>
+          <a:lstStyle/>
+          <a:p>
+            <a:pPr algn="ctr"/>
+            <a:r>
+              <a:rPr lang="en-US" sz="4000" b="1" dirty="0"/>
+              <a:t>4</a:t>
+            </a:r>
+          </a:p>
+        </p:txBody>
+      </p:sp>
+      <p:sp>
+        <p:nvSpPr>
+          <p:cNvPr id="7" name="Oval 6">
+            <a:extLst>
+              <a:ext uri="{FF2B5EF4-FFF2-40B4-BE49-F238E27FC236}">
+                <a16:creationId xmlns:a16="http://schemas.microsoft.com/office/drawing/2014/main" id="{9740C8BE-1CA2-D134-3CFB-671E09EE7181}"/>
+              </a:ext>
+            </a:extLst>
+          </p:cNvPr>
+          <p:cNvSpPr/>
+          <p:nvPr/>
+        </p:nvSpPr>
+        <p:spPr>
+          <a:xfrm>
+            <a:off x="3729551" y="2722276"/>
+            <a:ext cx="720000" cy="720000"/>
+          </a:xfrm>
+          <a:prstGeom prst="ellipse">
+            <a:avLst/>
+          </a:prstGeom>
+          <a:solidFill>
+            <a:srgbClr val="6AB5FF"/>
+          </a:solidFill>
+        </p:spPr>
+        <p:style>
+          <a:lnRef idx="2">
+            <a:schemeClr val="accent1">
+              <a:shade val="15000"/>
+            </a:schemeClr>
+          </a:lnRef>
+          <a:fillRef idx="1">
+            <a:schemeClr val="accent1"/>
+          </a:fillRef>
+          <a:effectRef idx="0">
+            <a:schemeClr val="accent1"/>
+          </a:effectRef>
+          <a:fontRef idx="minor">
+            <a:schemeClr val="lt1"/>
+          </a:fontRef>
+        </p:style>
+        <p:txBody>
+          <a:bodyPr rtlCol="0" anchor="ctr"/>
+          <a:lstStyle/>
+          <a:p>
+            <a:pPr algn="ctr"/>
+            <a:r>
+              <a:rPr lang="en-US" sz="4000" b="1" dirty="0"/>
+              <a:t>2</a:t>
+            </a:r>
+          </a:p>
+        </p:txBody>
+      </p:sp>
+      <p:cxnSp>
+        <p:nvCxnSpPr>
+          <p:cNvPr id="9" name="Straight Connector 8">
+            <a:extLst>
+              <a:ext uri="{FF2B5EF4-FFF2-40B4-BE49-F238E27FC236}">
+                <a16:creationId xmlns:a16="http://schemas.microsoft.com/office/drawing/2014/main" id="{5AB84394-A78C-7B09-BB27-ED0A5105E8CE}"/>
+              </a:ext>
+            </a:extLst>
+          </p:cNvPr>
+          <p:cNvCxnSpPr>
+            <a:cxnSpLocks/>
+            <a:stCxn id="7" idx="7"/>
+            <a:endCxn id="6" idx="3"/>
+          </p:cNvCxnSpPr>
+          <p:nvPr/>
+        </p:nvCxnSpPr>
+        <p:spPr>
+          <a:xfrm flipV="1">
+            <a:off x="4344109" y="2251287"/>
+            <a:ext cx="1375919" cy="576431"/>
+          </a:xfrm>
+          <a:prstGeom prst="line">
+            <a:avLst/>
+          </a:prstGeom>
+          <a:ln w="38100">
+            <a:solidFill>
+              <a:srgbClr val="AAAAAA"/>
+            </a:solidFill>
+          </a:ln>
+        </p:spPr>
+        <p:style>
+          <a:lnRef idx="1">
+            <a:schemeClr val="accent1"/>
+          </a:lnRef>
+          <a:fillRef idx="0">
+            <a:schemeClr val="accent1"/>
+          </a:fillRef>
+          <a:effectRef idx="0">
+            <a:schemeClr val="accent1"/>
+          </a:effectRef>
+          <a:fontRef idx="minor">
+            <a:schemeClr val="tx1"/>
+          </a:fontRef>
+        </p:style>
+      </p:cxnSp>
+      <p:sp>
+        <p:nvSpPr>
+          <p:cNvPr id="10" name="Oval 9">
+            <a:extLst>
+              <a:ext uri="{FF2B5EF4-FFF2-40B4-BE49-F238E27FC236}">
+                <a16:creationId xmlns:a16="http://schemas.microsoft.com/office/drawing/2014/main" id="{D362883D-D708-47C5-E4B4-6AEDE10BC919}"/>
+              </a:ext>
+            </a:extLst>
+          </p:cNvPr>
+          <p:cNvSpPr/>
+          <p:nvPr/>
+        </p:nvSpPr>
+        <p:spPr>
+          <a:xfrm>
+            <a:off x="2853137" y="3761099"/>
+            <a:ext cx="720000" cy="720000"/>
+          </a:xfrm>
+          <a:prstGeom prst="ellipse">
+            <a:avLst/>
+          </a:prstGeom>
+          <a:solidFill>
+            <a:srgbClr val="6AB5FF"/>
+          </a:solidFill>
+        </p:spPr>
+        <p:style>
+          <a:lnRef idx="2">
+            <a:schemeClr val="accent1">
+              <a:shade val="15000"/>
+            </a:schemeClr>
+          </a:lnRef>
+          <a:fillRef idx="1">
+            <a:schemeClr val="accent1"/>
+          </a:fillRef>
+          <a:effectRef idx="0">
+            <a:schemeClr val="accent1"/>
+          </a:effectRef>
+          <a:fontRef idx="minor">
+            <a:schemeClr val="lt1"/>
+          </a:fontRef>
+        </p:style>
+        <p:txBody>
+          <a:bodyPr rtlCol="0" anchor="ctr"/>
+          <a:lstStyle/>
+          <a:p>
+            <a:pPr algn="ctr"/>
+            <a:r>
+              <a:rPr lang="en-US" sz="4000" b="1" dirty="0"/>
+              <a:t>1</a:t>
+            </a:r>
+          </a:p>
+        </p:txBody>
+      </p:sp>
+      <p:cxnSp>
+        <p:nvCxnSpPr>
+          <p:cNvPr id="11" name="Straight Connector 10">
+            <a:extLst>
+              <a:ext uri="{FF2B5EF4-FFF2-40B4-BE49-F238E27FC236}">
+                <a16:creationId xmlns:a16="http://schemas.microsoft.com/office/drawing/2014/main" id="{A0EE353F-98C1-FA33-4BEF-73E20FF8E5BF}"/>
+              </a:ext>
+            </a:extLst>
+          </p:cNvPr>
+          <p:cNvCxnSpPr>
+            <a:cxnSpLocks/>
+            <a:stCxn id="10" idx="7"/>
+            <a:endCxn id="7" idx="3"/>
+          </p:cNvCxnSpPr>
+          <p:nvPr/>
+        </p:nvCxnSpPr>
+        <p:spPr>
+          <a:xfrm flipV="1">
+            <a:off x="3467695" y="3336834"/>
+            <a:ext cx="367298" cy="529707"/>
+          </a:xfrm>
+          <a:prstGeom prst="line">
+            <a:avLst/>
+          </a:prstGeom>
+          <a:ln w="38100">
+            <a:solidFill>
+              <a:srgbClr val="AAAAAA"/>
+            </a:solidFill>
+          </a:ln>
+        </p:spPr>
+        <p:style>
+          <a:lnRef idx="1">
+            <a:schemeClr val="accent1"/>
+          </a:lnRef>
+          <a:fillRef idx="0">
+            <a:schemeClr val="accent1"/>
+          </a:fillRef>
+          <a:effectRef idx="0">
+            <a:schemeClr val="accent1"/>
+          </a:effectRef>
+          <a:fontRef idx="minor">
+            <a:schemeClr val="tx1"/>
+          </a:fontRef>
+        </p:style>
+      </p:cxnSp>
+      <p:sp>
+        <p:nvSpPr>
+          <p:cNvPr id="12" name="Oval 11">
+            <a:extLst>
+              <a:ext uri="{FF2B5EF4-FFF2-40B4-BE49-F238E27FC236}">
+                <a16:creationId xmlns:a16="http://schemas.microsoft.com/office/drawing/2014/main" id="{D7EBFC2D-0719-D489-BF8F-95D7023FD1AD}"/>
+              </a:ext>
+            </a:extLst>
+          </p:cNvPr>
+          <p:cNvSpPr/>
+          <p:nvPr/>
+        </p:nvSpPr>
+        <p:spPr>
+          <a:xfrm>
+            <a:off x="7742450" y="2722276"/>
+            <a:ext cx="720000" cy="720000"/>
+          </a:xfrm>
+          <a:prstGeom prst="ellipse">
+            <a:avLst/>
+          </a:prstGeom>
+          <a:solidFill>
+            <a:srgbClr val="6AB5FF"/>
+          </a:solidFill>
+        </p:spPr>
+        <p:style>
+          <a:lnRef idx="2">
+            <a:schemeClr val="accent1">
+              <a:shade val="15000"/>
+            </a:schemeClr>
+          </a:lnRef>
+          <a:fillRef idx="1">
+            <a:schemeClr val="accent1"/>
+          </a:fillRef>
+          <a:effectRef idx="0">
+            <a:schemeClr val="accent1"/>
+          </a:effectRef>
+          <a:fontRef idx="minor">
+            <a:schemeClr val="lt1"/>
+          </a:fontRef>
+        </p:style>
+        <p:txBody>
+          <a:bodyPr rtlCol="0" anchor="ctr"/>
+          <a:lstStyle/>
+          <a:p>
+            <a:pPr algn="ctr"/>
+            <a:r>
+              <a:rPr lang="en-US" sz="4000" b="1" dirty="0"/>
+              <a:t>6</a:t>
+            </a:r>
+          </a:p>
+        </p:txBody>
+      </p:sp>
+      <p:cxnSp>
+        <p:nvCxnSpPr>
+          <p:cNvPr id="13" name="Straight Connector 12">
+            <a:extLst>
+              <a:ext uri="{FF2B5EF4-FFF2-40B4-BE49-F238E27FC236}">
+                <a16:creationId xmlns:a16="http://schemas.microsoft.com/office/drawing/2014/main" id="{20B3BB64-7329-0F10-2098-6517F66F3DBA}"/>
+              </a:ext>
+            </a:extLst>
+          </p:cNvPr>
+          <p:cNvCxnSpPr>
+            <a:cxnSpLocks/>
+            <a:stCxn id="12" idx="1"/>
+            <a:endCxn id="6" idx="5"/>
+          </p:cNvCxnSpPr>
+          <p:nvPr/>
+        </p:nvCxnSpPr>
+        <p:spPr>
+          <a:xfrm flipH="1" flipV="1">
+            <a:off x="6229144" y="2251287"/>
+            <a:ext cx="1618748" cy="576431"/>
+          </a:xfrm>
+          <a:prstGeom prst="line">
+            <a:avLst/>
+          </a:prstGeom>
+          <a:ln w="38100">
+            <a:solidFill>
+              <a:srgbClr val="FFC000"/>
+            </a:solidFill>
+          </a:ln>
+        </p:spPr>
+        <p:style>
+          <a:lnRef idx="1">
+            <a:schemeClr val="accent1"/>
+          </a:lnRef>
+          <a:fillRef idx="0">
+            <a:schemeClr val="accent1"/>
+          </a:fillRef>
+          <a:effectRef idx="0">
+            <a:schemeClr val="accent1"/>
+          </a:effectRef>
+          <a:fontRef idx="minor">
+            <a:schemeClr val="tx1"/>
+          </a:fontRef>
+        </p:style>
+      </p:cxnSp>
+      <p:sp>
+        <p:nvSpPr>
+          <p:cNvPr id="14" name="Oval 13">
+            <a:extLst>
+              <a:ext uri="{FF2B5EF4-FFF2-40B4-BE49-F238E27FC236}">
+                <a16:creationId xmlns:a16="http://schemas.microsoft.com/office/drawing/2014/main" id="{DACBF97C-9491-3662-B088-63EAAE583A75}"/>
+              </a:ext>
+            </a:extLst>
+          </p:cNvPr>
+          <p:cNvSpPr/>
+          <p:nvPr/>
+        </p:nvSpPr>
+        <p:spPr>
+          <a:xfrm>
+            <a:off x="4703604" y="3761099"/>
+            <a:ext cx="720000" cy="720000"/>
+          </a:xfrm>
+          <a:prstGeom prst="ellipse">
+            <a:avLst/>
+          </a:prstGeom>
+          <a:solidFill>
+            <a:srgbClr val="6AB5FF"/>
+          </a:solidFill>
+        </p:spPr>
+        <p:style>
+          <a:lnRef idx="2">
+            <a:schemeClr val="accent1">
+              <a:shade val="15000"/>
+            </a:schemeClr>
+          </a:lnRef>
+          <a:fillRef idx="1">
+            <a:schemeClr val="accent1"/>
+          </a:fillRef>
+          <a:effectRef idx="0">
+            <a:schemeClr val="accent1"/>
+          </a:effectRef>
+          <a:fontRef idx="minor">
+            <a:schemeClr val="lt1"/>
+          </a:fontRef>
+        </p:style>
+        <p:txBody>
+          <a:bodyPr rtlCol="0" anchor="ctr"/>
+          <a:lstStyle/>
+          <a:p>
+            <a:pPr algn="ctr"/>
+            <a:r>
+              <a:rPr lang="en-US" sz="4000" b="1" dirty="0"/>
+              <a:t>3</a:t>
+            </a:r>
+          </a:p>
+        </p:txBody>
+      </p:sp>
+      <p:cxnSp>
+        <p:nvCxnSpPr>
+          <p:cNvPr id="15" name="Straight Connector 14">
+            <a:extLst>
+              <a:ext uri="{FF2B5EF4-FFF2-40B4-BE49-F238E27FC236}">
+                <a16:creationId xmlns:a16="http://schemas.microsoft.com/office/drawing/2014/main" id="{06EAA2A6-E328-7BA5-8E97-9E6A43EFE0B1}"/>
+              </a:ext>
+            </a:extLst>
+          </p:cNvPr>
+          <p:cNvCxnSpPr>
+            <a:cxnSpLocks/>
+            <a:stCxn id="14" idx="1"/>
+            <a:endCxn id="7" idx="5"/>
+          </p:cNvCxnSpPr>
+          <p:nvPr/>
+        </p:nvCxnSpPr>
+        <p:spPr>
+          <a:xfrm flipH="1" flipV="1">
+            <a:off x="4344109" y="3336834"/>
+            <a:ext cx="464937" cy="529707"/>
+          </a:xfrm>
+          <a:prstGeom prst="line">
+            <a:avLst/>
+          </a:prstGeom>
+          <a:ln w="38100">
+            <a:solidFill>
+              <a:srgbClr val="AAAAAA"/>
+            </a:solidFill>
+          </a:ln>
+        </p:spPr>
+        <p:style>
+          <a:lnRef idx="1">
+            <a:schemeClr val="accent1"/>
+          </a:lnRef>
+          <a:fillRef idx="0">
+            <a:schemeClr val="accent1"/>
+          </a:fillRef>
+          <a:effectRef idx="0">
+            <a:schemeClr val="accent1"/>
+          </a:effectRef>
+          <a:fontRef idx="minor">
+            <a:schemeClr val="tx1"/>
+          </a:fontRef>
+        </p:style>
+      </p:cxnSp>
+      <p:sp>
+        <p:nvSpPr>
+          <p:cNvPr id="28" name="Oval 27">
+            <a:extLst>
+              <a:ext uri="{FF2B5EF4-FFF2-40B4-BE49-F238E27FC236}">
+                <a16:creationId xmlns:a16="http://schemas.microsoft.com/office/drawing/2014/main" id="{E3E142DD-9107-1FFA-FB13-A7F24B98CE24}"/>
+              </a:ext>
+            </a:extLst>
+          </p:cNvPr>
+          <p:cNvSpPr/>
+          <p:nvPr/>
+        </p:nvSpPr>
+        <p:spPr>
+          <a:xfrm>
+            <a:off x="6768397" y="3762143"/>
+            <a:ext cx="720000" cy="720000"/>
+          </a:xfrm>
+          <a:prstGeom prst="ellipse">
+            <a:avLst/>
+          </a:prstGeom>
+          <a:solidFill>
+            <a:srgbClr val="6AB5FF"/>
+          </a:solidFill>
+        </p:spPr>
+        <p:style>
+          <a:lnRef idx="2">
+            <a:schemeClr val="accent1">
+              <a:shade val="15000"/>
+            </a:schemeClr>
+          </a:lnRef>
+          <a:fillRef idx="1">
+            <a:schemeClr val="accent1"/>
+          </a:fillRef>
+          <a:effectRef idx="0">
+            <a:schemeClr val="accent1"/>
+          </a:effectRef>
+          <a:fontRef idx="minor">
+            <a:schemeClr val="lt1"/>
+          </a:fontRef>
+        </p:style>
+        <p:txBody>
+          <a:bodyPr rtlCol="0" anchor="ctr"/>
+          <a:lstStyle/>
+          <a:p>
+            <a:pPr algn="ctr"/>
+            <a:r>
+              <a:rPr lang="en-US" sz="4000" b="1" dirty="0"/>
+              <a:t>5</a:t>
+            </a:r>
+          </a:p>
+        </p:txBody>
+      </p:sp>
+      <p:cxnSp>
+        <p:nvCxnSpPr>
+          <p:cNvPr id="29" name="Straight Connector 28">
+            <a:extLst>
+              <a:ext uri="{FF2B5EF4-FFF2-40B4-BE49-F238E27FC236}">
+                <a16:creationId xmlns:a16="http://schemas.microsoft.com/office/drawing/2014/main" id="{DCED2007-1D05-5186-3100-7A0357D55B8F}"/>
+              </a:ext>
+            </a:extLst>
+          </p:cNvPr>
+          <p:cNvCxnSpPr>
+            <a:cxnSpLocks/>
+            <a:stCxn id="28" idx="7"/>
+            <a:endCxn id="12" idx="3"/>
+          </p:cNvCxnSpPr>
+          <p:nvPr/>
+        </p:nvCxnSpPr>
+        <p:spPr>
+          <a:xfrm flipV="1">
+            <a:off x="7382955" y="3336834"/>
+            <a:ext cx="464937" cy="530751"/>
+          </a:xfrm>
+          <a:prstGeom prst="line">
+            <a:avLst/>
+          </a:prstGeom>
+          <a:ln w="38100">
+            <a:solidFill>
+              <a:srgbClr val="AAAAAA"/>
+            </a:solidFill>
+          </a:ln>
+        </p:spPr>
+        <p:style>
+          <a:lnRef idx="1">
+            <a:schemeClr val="accent1"/>
+          </a:lnRef>
+          <a:fillRef idx="0">
+            <a:schemeClr val="accent1"/>
+          </a:fillRef>
+          <a:effectRef idx="0">
+            <a:schemeClr val="accent1"/>
+          </a:effectRef>
+          <a:fontRef idx="minor">
+            <a:schemeClr val="tx1"/>
+          </a:fontRef>
+        </p:style>
+      </p:cxnSp>
+      <p:sp>
+        <p:nvSpPr>
+          <p:cNvPr id="30" name="Oval 29">
+            <a:extLst>
+              <a:ext uri="{FF2B5EF4-FFF2-40B4-BE49-F238E27FC236}">
+                <a16:creationId xmlns:a16="http://schemas.microsoft.com/office/drawing/2014/main" id="{63583A71-5D99-F7C2-380A-DA3DE3CE88EF}"/>
+              </a:ext>
+            </a:extLst>
+          </p:cNvPr>
+          <p:cNvSpPr/>
+          <p:nvPr/>
+        </p:nvSpPr>
+        <p:spPr>
+          <a:xfrm>
+            <a:off x="8701771" y="3762143"/>
+            <a:ext cx="720000" cy="720000"/>
+          </a:xfrm>
+          <a:prstGeom prst="ellipse">
+            <a:avLst/>
+          </a:prstGeom>
+          <a:solidFill>
+            <a:srgbClr val="6AB5FF"/>
+          </a:solidFill>
+        </p:spPr>
+        <p:style>
+          <a:lnRef idx="2">
+            <a:schemeClr val="accent1">
+              <a:shade val="15000"/>
+            </a:schemeClr>
+          </a:lnRef>
+          <a:fillRef idx="1">
+            <a:schemeClr val="accent1"/>
+          </a:fillRef>
+          <a:effectRef idx="0">
+            <a:schemeClr val="accent1"/>
+          </a:effectRef>
+          <a:fontRef idx="minor">
+            <a:schemeClr val="lt1"/>
+          </a:fontRef>
+        </p:style>
+        <p:txBody>
+          <a:bodyPr rtlCol="0" anchor="ctr"/>
+          <a:lstStyle/>
+          <a:p>
+            <a:pPr algn="ctr"/>
+            <a:r>
+              <a:rPr lang="en-US" sz="4000" b="1" dirty="0"/>
+              <a:t>7</a:t>
+            </a:r>
+          </a:p>
+        </p:txBody>
+      </p:sp>
+      <p:cxnSp>
+        <p:nvCxnSpPr>
+          <p:cNvPr id="31" name="Straight Connector 30">
+            <a:extLst>
+              <a:ext uri="{FF2B5EF4-FFF2-40B4-BE49-F238E27FC236}">
+                <a16:creationId xmlns:a16="http://schemas.microsoft.com/office/drawing/2014/main" id="{E3016C63-0230-0E50-FE69-BFE272C0A006}"/>
+              </a:ext>
+            </a:extLst>
+          </p:cNvPr>
+          <p:cNvCxnSpPr>
+            <a:cxnSpLocks/>
+            <a:stCxn id="30" idx="1"/>
+            <a:endCxn id="12" idx="5"/>
+          </p:cNvCxnSpPr>
+          <p:nvPr/>
+        </p:nvCxnSpPr>
+        <p:spPr>
+          <a:xfrm flipH="1" flipV="1">
+            <a:off x="8357008" y="3336834"/>
+            <a:ext cx="450205" cy="530751"/>
+          </a:xfrm>
+          <a:prstGeom prst="line">
+            <a:avLst/>
+          </a:prstGeom>
+          <a:ln w="38100">
+            <a:solidFill>
+              <a:srgbClr val="AAAAAA"/>
+            </a:solidFill>
+          </a:ln>
+        </p:spPr>
+        <p:style>
+          <a:lnRef idx="1">
+            <a:schemeClr val="accent1"/>
+          </a:lnRef>
+          <a:fillRef idx="0">
+            <a:schemeClr val="accent1"/>
+          </a:fillRef>
+          <a:effectRef idx="0">
+            <a:schemeClr val="accent1"/>
+          </a:effectRef>
+          <a:fontRef idx="minor">
+            <a:schemeClr val="tx1"/>
+          </a:fontRef>
+        </p:style>
+      </p:cxnSp>
+      <p:sp>
+        <p:nvSpPr>
+          <p:cNvPr id="8" name="TextBox 7">
+            <a:extLst>
+              <a:ext uri="{FF2B5EF4-FFF2-40B4-BE49-F238E27FC236}">
+                <a16:creationId xmlns:a16="http://schemas.microsoft.com/office/drawing/2014/main" id="{A08711AC-4046-3B0D-5A1C-70FDD33128D1}"/>
+              </a:ext>
+            </a:extLst>
+          </p:cNvPr>
+          <p:cNvSpPr txBox="1"/>
+          <p:nvPr/>
+        </p:nvSpPr>
+        <p:spPr>
+          <a:xfrm>
+            <a:off x="609600" y="5469819"/>
+            <a:ext cx="10972800" cy="477054"/>
+          </a:xfrm>
+          <a:prstGeom prst="rect">
+            <a:avLst/>
+          </a:prstGeom>
+          <a:noFill/>
+        </p:spPr>
+        <p:txBody>
+          <a:bodyPr wrap="square">
+            <a:spAutoFit/>
+          </a:bodyPr>
+          <a:lstStyle/>
+          <a:p>
+            <a:pPr algn="ctr"/>
+            <a:r>
+              <a:rPr lang="en-PH" sz="2500" b="1">
+                <a:solidFill>
+                  <a:schemeClr val="bg1"/>
+                </a:solidFill>
+              </a:rPr>
+              <a:t>Because</a:t>
+            </a:r>
+            <a:r>
+              <a:rPr lang="en-PH" sz="2500" b="1">
+                <a:solidFill>
+                  <a:srgbClr val="00B0F0"/>
+                </a:solidFill>
+              </a:rPr>
+              <a:t> </a:t>
+            </a:r>
+            <a:r>
+              <a:rPr lang="en-PH" sz="2500" b="1" dirty="0">
+                <a:solidFill>
+                  <a:srgbClr val="00B0F0"/>
+                </a:solidFill>
+              </a:rPr>
+              <a:t>5 is greater than 4</a:t>
+            </a:r>
+            <a:r>
+              <a:rPr lang="en-PH" sz="2500" b="1" dirty="0">
+                <a:solidFill>
+                  <a:schemeClr val="bg1"/>
+                </a:solidFill>
+              </a:rPr>
+              <a:t>, we know that we should go to the right subtree.</a:t>
+            </a:r>
+            <a:endParaRPr lang="en-US" sz="2500" dirty="0">
+              <a:solidFill>
+                <a:schemeClr val="bg1"/>
+              </a:solidFill>
+            </a:endParaRPr>
+          </a:p>
+        </p:txBody>
+      </p:sp>
+      <p:sp>
+        <p:nvSpPr>
+          <p:cNvPr id="3" name="TextBox 2">
+            <a:extLst>
+              <a:ext uri="{FF2B5EF4-FFF2-40B4-BE49-F238E27FC236}">
+                <a16:creationId xmlns:a16="http://schemas.microsoft.com/office/drawing/2014/main" id="{8A54ED49-7D2A-68DF-D240-120B7906C4AA}"/>
+              </a:ext>
+            </a:extLst>
+          </p:cNvPr>
+          <p:cNvSpPr txBox="1"/>
+          <p:nvPr/>
+        </p:nvSpPr>
+        <p:spPr>
+          <a:xfrm>
+            <a:off x="3017587" y="1588495"/>
+            <a:ext cx="1748914" cy="477054"/>
+          </a:xfrm>
+          <a:prstGeom prst="rect">
+            <a:avLst/>
+          </a:prstGeom>
+          <a:noFill/>
+        </p:spPr>
+        <p:txBody>
+          <a:bodyPr wrap="square">
+            <a:spAutoFit/>
+          </a:bodyPr>
+          <a:lstStyle/>
+          <a:p>
+            <a:pPr algn="ctr"/>
+            <a:r>
+              <a:rPr lang="en-PH" sz="2500" b="1" dirty="0">
+                <a:solidFill>
+                  <a:schemeClr val="bg1"/>
+                </a:solidFill>
+              </a:rPr>
+              <a:t>Less than 4</a:t>
+            </a:r>
+            <a:endParaRPr lang="en-US" sz="2500" dirty="0">
+              <a:solidFill>
+                <a:schemeClr val="bg1"/>
+              </a:solidFill>
+            </a:endParaRPr>
+          </a:p>
+        </p:txBody>
+      </p:sp>
+      <p:sp>
+        <p:nvSpPr>
+          <p:cNvPr id="23" name="TextBox 22">
+            <a:extLst>
+              <a:ext uri="{FF2B5EF4-FFF2-40B4-BE49-F238E27FC236}">
+                <a16:creationId xmlns:a16="http://schemas.microsoft.com/office/drawing/2014/main" id="{32019847-0EE9-8442-CECF-CDF7FF896DB0}"/>
+              </a:ext>
+            </a:extLst>
+          </p:cNvPr>
+          <p:cNvSpPr txBox="1"/>
+          <p:nvPr/>
+        </p:nvSpPr>
+        <p:spPr>
+          <a:xfrm>
+            <a:off x="7119864" y="1588495"/>
+            <a:ext cx="2117356" cy="477054"/>
+          </a:xfrm>
+          <a:prstGeom prst="rect">
+            <a:avLst/>
+          </a:prstGeom>
+          <a:noFill/>
+        </p:spPr>
+        <p:txBody>
+          <a:bodyPr wrap="square">
+            <a:spAutoFit/>
+          </a:bodyPr>
+          <a:lstStyle/>
+          <a:p>
+            <a:pPr algn="ctr"/>
+            <a:r>
+              <a:rPr lang="en-PH" sz="2500" b="1" dirty="0">
+                <a:solidFill>
+                  <a:schemeClr val="bg1"/>
+                </a:solidFill>
+              </a:rPr>
+              <a:t>Greater than 4</a:t>
+            </a:r>
+            <a:endParaRPr lang="en-US" sz="2500" dirty="0">
+              <a:solidFill>
+                <a:schemeClr val="bg1"/>
+              </a:solidFill>
+            </a:endParaRPr>
+          </a:p>
+        </p:txBody>
+      </p:sp>
+    </p:spTree>
+    <p:extLst>
+      <p:ext uri="{BB962C8B-B14F-4D97-AF65-F5344CB8AC3E}">
+        <p14:creationId xmlns:p14="http://schemas.microsoft.com/office/powerpoint/2010/main" val="2695136288"/>
+      </p:ext>
+    </p:extLst>
+  </p:cSld>
+  <p:clrMapOvr>
+    <a:masterClrMapping/>
+  </p:clrMapOvr>
+  <mc:AlternateContent xmlns:mc="http://schemas.openxmlformats.org/markup-compatibility/2006">
+    <mc:Choice xmlns:p159="http://schemas.microsoft.com/office/powerpoint/2015/09/main" Requires="p159">
+      <p:transition xmlns:p14="http://schemas.microsoft.com/office/powerpoint/2010/main" spd="slow" p14:dur="2000">
+        <p159:morph option="byObject"/>
+      </p:transition>
+    </mc:Choice>
+    <mc:Fallback>
+      <p:transition spd="slow">
+        <p:fade/>
+      </p:transition>
+    </mc:Fallback>
+  </mc:AlternateContent>
+</p:sld>
+</file>
+
+<file path=ppt/slides/slide16.xml><?xml version="1.0" encoding="utf-8"?>
+<p:sld xmlns:a="http://schemas.openxmlformats.org/drawingml/2006/main" xmlns:r="http://schemas.openxmlformats.org/officeDocument/2006/relationships" xmlns:p="http://schemas.openxmlformats.org/presentationml/2006/main">
+  <p:cSld>
+    <p:bg>
+      <p:bgPr>
+        <a:solidFill>
+          <a:schemeClr val="tx1"/>
+        </a:solidFill>
+        <a:effectLst/>
+      </p:bgPr>
+    </p:bg>
+    <p:spTree>
+      <p:nvGrpSpPr>
+        <p:cNvPr id="1" name="">
+          <a:extLst>
+            <a:ext uri="{FF2B5EF4-FFF2-40B4-BE49-F238E27FC236}">
               <a16:creationId xmlns:a16="http://schemas.microsoft.com/office/drawing/2014/main" id="{6CE4CAAB-AA4D-0858-A5D2-AD126DF463BD}"/>
             </a:ext>
           </a:extLst>
@@ -12956,7 +14101,7 @@
 </p:sld>
 </file>
 
-<file path=ppt/slides/slide16.xml><?xml version="1.0" encoding="utf-8"?>
+<file path=ppt/slides/slide17.xml><?xml version="1.0" encoding="utf-8"?>
 <p:sld xmlns:a="http://schemas.openxmlformats.org/drawingml/2006/main" xmlns:r="http://schemas.openxmlformats.org/officeDocument/2006/relationships" xmlns:p="http://schemas.openxmlformats.org/presentationml/2006/main">
   <p:cSld>
     <p:bg>
